--- a/NUDGE-Methods-Simple.pptx
+++ b/NUDGE-Methods-Simple.pptx
@@ -644,7 +644,7 @@
           <a:lstStyle/>
           <a:p>
             <a:r>
-              <a:t>Andrew (60 sec spoken, plain): For each topic we run a fair comparison that accounts for review length, language, and prefecture. Because we test many topics, we tighten the bar to avoid false alarms. A topic is kept only if the link is solid, harmful, and seen at least 20 times. We then label each survivor as something information can help or something the operator must fix.</a:t>
+              <a:t>Andrew (60 sec): For each of the 18 topics we fit a separate multiple logistic regression, asking whether mentioning the problem predicts a low rating after adjusting for review length, language, and prefecture. Each model gives an adjusted odds ratio with a 95 percent confidence interval. Because we test many topics, we correct for multiple comparisons using the false-discovery rate. A topic is kept only if it is statistically significant, points to worse ratings, and is seen at least 20 times. We then label each survivor as something information can help or something the operator must fix.</a:t>
             </a:r>
           </a:p>
           <a:p/>
@@ -5001,8 +5001,8 @@
         </p:nvSpPr>
         <p:spPr>
           <a:xfrm>
-            <a:off x="548640" y="1828800"/>
-            <a:ext cx="5943600" cy="4206240"/>
+            <a:off x="548640" y="1737360"/>
+            <a:ext cx="6126480" cy="4206240"/>
           </a:xfrm>
           <a:prstGeom prst="rect">
             <a:avLst/>
@@ -5024,7 +5024,7 @@
               </a:spcAft>
             </a:pPr>
             <a:r>
-              <a:rPr sz="1500" b="0" i="0">
+              <a:rPr sz="1350" b="0" i="0">
                 <a:solidFill>
                   <a:srgbClr val="14181D"/>
                 </a:solidFill>
@@ -5032,7 +5032,7 @@
                 <a:ea typeface="Century Gothic"/>
                 <a:cs typeface="Century Gothic"/>
               </a:rPr>
-              <a:t>•  For each topic we make a fair comparison: are reviews that mention the problem more likely to be low-rated, after allowing for review length, language, and prefecture?</a:t>
+              <a:t>•  For each of the 18 topics we fit a multiple logistic regression: does mentioning the problem predict a low rating, after adjusting for review length, language, and prefecture?</a:t>
             </a:r>
           </a:p>
           <a:p>
@@ -5041,11 +5041,11 @@
                 <a:spcPts val="0"/>
               </a:spcBef>
               <a:spcAft>
-                <a:spcPts val="1500"/>
+                <a:spcPts val="900"/>
               </a:spcAft>
             </a:pPr>
             <a:r>
-              <a:rPr sz="1150" b="0" i="0">
+              <a:rPr sz="1050" b="0" i="0">
                 <a:solidFill>
                   <a:srgbClr val="5A6573"/>
                 </a:solidFill>
@@ -5053,7 +5053,7 @@
                 <a:ea typeface="Yu Gothic"/>
                 <a:cs typeface="Yu Gothic"/>
               </a:rPr>
-              <a:t>　 各話題で公平に比較する：口コミの長さ・言語・県の違いをそろえた上で、その問題に触れた口コミは低評価になりやすいか？</a:t>
+              <a:t>　 18の話題ごとに多重ロジスティック回帰を行う:口コミの長さ・言語・県をそろえた上で、その問題への言及が低評価を予測するか？</a:t>
             </a:r>
           </a:p>
           <a:p>
@@ -5066,7 +5066,7 @@
               </a:spcAft>
             </a:pPr>
             <a:r>
-              <a:rPr sz="1500" b="0" i="0">
+              <a:rPr sz="1350" b="0" i="0">
                 <a:solidFill>
                   <a:srgbClr val="14181D"/>
                 </a:solidFill>
@@ -5074,7 +5074,7 @@
                 <a:ea typeface="Century Gothic"/>
                 <a:cs typeface="Century Gothic"/>
               </a:rPr>
-              <a:t>•  We test many topics, so we tighten the bar to avoid being fooled by chance.</a:t>
+              <a:t>•  Each model returns an adjusted odds ratio with a 95% confidence interval - how strongly the topic is tied to a low rating.</a:t>
             </a:r>
           </a:p>
           <a:p>
@@ -5083,11 +5083,11 @@
                 <a:spcPts val="0"/>
               </a:spcBef>
               <a:spcAft>
-                <a:spcPts val="1500"/>
+                <a:spcPts val="900"/>
               </a:spcAft>
             </a:pPr>
             <a:r>
-              <a:rPr sz="1150" b="0" i="0">
+              <a:rPr sz="1050" b="0" i="0">
                 <a:solidFill>
                   <a:srgbClr val="5A6573"/>
                 </a:solidFill>
@@ -5095,7 +5095,7 @@
                 <a:ea typeface="Yu Gothic"/>
                 <a:cs typeface="Yu Gothic"/>
               </a:rPr>
-              <a:t>　 多くの話題を調べるので、偶然の当たりに惑わされないよう基準を厳しくする。</a:t>
+              <a:t>　 各モデルは、調整済みオッズ比と95%信頼区間を返す:その話題が低評価とどれだけ強く結びつくか。</a:t>
             </a:r>
           </a:p>
           <a:p>
@@ -5108,7 +5108,7 @@
               </a:spcAft>
             </a:pPr>
             <a:r>
-              <a:rPr sz="1500" b="0" i="0">
+              <a:rPr sz="1350" b="0" i="0">
                 <a:solidFill>
                   <a:srgbClr val="14181D"/>
                 </a:solidFill>
@@ -5116,7 +5116,7 @@
                 <a:ea typeface="Century Gothic"/>
                 <a:cs typeface="Century Gothic"/>
               </a:rPr>
-              <a:t>•  A topic is kept only if the link is solid, points to worse ratings, and appears at least 20 times.</a:t>
+              <a:t>•  Because we test many topics, we correct for multiple comparisons (false-discovery rate) so chance findings do not slip through.</a:t>
             </a:r>
           </a:p>
           <a:p>
@@ -5125,11 +5125,11 @@
                 <a:spcPts val="0"/>
               </a:spcBef>
               <a:spcAft>
-                <a:spcPts val="1500"/>
+                <a:spcPts val="900"/>
               </a:spcAft>
             </a:pPr>
             <a:r>
-              <a:rPr sz="1150" b="0" i="0">
+              <a:rPr sz="1050" b="0" i="0">
                 <a:solidFill>
                   <a:srgbClr val="5A6573"/>
                 </a:solidFill>
@@ -5137,7 +5137,7 @@
                 <a:ea typeface="Yu Gothic"/>
                 <a:cs typeface="Yu Gothic"/>
               </a:rPr>
-              <a:t>　 残すのは、結びつきが確かで、悪い評価の方向で、20回以上現れた話題だけ。</a:t>
+              <a:t>　 多くの話題を検定するため、多重比較の補正(偽発見率・FDR)を行い、偶然の結果を除く。</a:t>
             </a:r>
           </a:p>
           <a:p>
@@ -5150,7 +5150,7 @@
               </a:spcAft>
             </a:pPr>
             <a:r>
-              <a:rPr sz="1500" b="0" i="0">
+              <a:rPr sz="1350" b="0" i="0">
                 <a:solidFill>
                   <a:srgbClr val="14181D"/>
                 </a:solidFill>
@@ -5158,7 +5158,49 @@
                 <a:ea typeface="Century Gothic"/>
                 <a:cs typeface="Century Gothic"/>
               </a:rPr>
-              <a:t>•  We then sort each kept topic into "better information can help" or "the site operator must act."</a:t>
+              <a:t>•  A topic is kept only if it is statistically significant, points to worse ratings, and appears at least 20 times.</a:t>
+            </a:r>
+          </a:p>
+          <a:p>
+            <a:pPr algn="l">
+              <a:spcBef>
+                <a:spcPts val="0"/>
+              </a:spcBef>
+              <a:spcAft>
+                <a:spcPts val="900"/>
+              </a:spcAft>
+            </a:pPr>
+            <a:r>
+              <a:rPr sz="1050" b="0" i="0">
+                <a:solidFill>
+                  <a:srgbClr val="5A6573"/>
+                </a:solidFill>
+                <a:latin typeface="Yu Gothic"/>
+                <a:ea typeface="Yu Gothic"/>
+                <a:cs typeface="Yu Gothic"/>
+              </a:rPr>
+              <a:t>　 統計的に有意で、悪い評価の方向で、20回以上現れた話題だけを残す。</a:t>
+            </a:r>
+          </a:p>
+          <a:p>
+            <a:pPr algn="l">
+              <a:spcBef>
+                <a:spcPts val="0"/>
+              </a:spcBef>
+              <a:spcAft>
+                <a:spcPts val="100"/>
+              </a:spcAft>
+            </a:pPr>
+            <a:r>
+              <a:rPr sz="1350" b="0" i="0">
+                <a:solidFill>
+                  <a:srgbClr val="14181D"/>
+                </a:solidFill>
+                <a:latin typeface="Century Gothic"/>
+                <a:ea typeface="Century Gothic"/>
+                <a:cs typeface="Century Gothic"/>
+              </a:rPr>
+              <a:t>•  We then sort each kept topic into "information can help" or "the operator must act."</a:t>
             </a:r>
           </a:p>
           <a:p>
@@ -5171,7 +5213,7 @@
               </a:spcAft>
             </a:pPr>
             <a:r>
-              <a:rPr sz="1150" b="0" i="0">
+              <a:rPr sz="1050" b="0" i="0">
                 <a:solidFill>
                   <a:srgbClr val="5A6573"/>
                 </a:solidFill>
